--- a/feature-slice/06-conversational-/conversational-qa.pptx
+++ b/feature-slice/06-conversational-/conversational-qa.pptx
@@ -5,15 +5,14 @@
     <p:sldMasterId id="2147483648" r:id="rId1"/>
   </p:sldMasterIdLst>
   <p:notesMasterIdLst>
-    <p:notesMasterId r:id="rId5"/>
+    <p:notesMasterId r:id="rId4"/>
   </p:notesMasterIdLst>
   <p:handoutMasterIdLst>
-    <p:handoutMasterId r:id="rId6"/>
+    <p:handoutMasterId r:id="rId5"/>
   </p:handoutMasterIdLst>
   <p:sldIdLst>
     <p:sldId id="313" r:id="rId2"/>
     <p:sldId id="314" r:id="rId3"/>
-    <p:sldId id="315" r:id="rId4"/>
   </p:sldIdLst>
   <p:sldSz cx="12192000" cy="6858000"/>
   <p:notesSz cx="6858000" cy="9144000"/>
@@ -205,7 +204,7 @@
           <a:p>
             <a:fld id="{1CFE36D4-B224-4D49-A73E-0BF1A210728E}" type="datetimeFigureOut">
               <a:rPr lang="ko-KR" altLang="en-US" smtClean="0"/>
-              <a:t>2026. 4. 10.</a:t>
+              <a:t>2026. 4. 13.</a:t>
             </a:fld>
             <a:endParaRPr lang="ko-KR" altLang="en-US"/>
           </a:p>
@@ -370,7 +369,7 @@
           <a:p>
             <a:fld id="{79F7304B-F283-4E41-A8FA-EB923FFBA2A0}" type="datetimeFigureOut">
               <a:rPr lang="ko-KR" altLang="en-US" smtClean="0"/>
-              <a:t>2026. 4. 10.</a:t>
+              <a:t>2026. 4. 13.</a:t>
             </a:fld>
             <a:endParaRPr lang="ko-KR" altLang="en-US"/>
           </a:p>
@@ -1461,7 +1460,7 @@
             <a:fld id="{A08F8EB2-BEDB-4375-BAD0-E61FA200F7A6}" type="datetimeFigureOut">
               <a:rPr lang="ko-KR" altLang="en-US" smtClean="0"/>
               <a:pPr/>
-              <a:t>2026. 4. 10.</a:t>
+              <a:t>2026. 4. 13.</a:t>
             </a:fld>
             <a:endParaRPr lang="ko-KR" altLang="en-US"/>
           </a:p>
@@ -3371,9 +3370,9 @@
             <a:off x="3014021" y="2817692"/>
             <a:ext cx="321977" cy="953578"/>
           </a:xfrm>
-          <a:prstGeom prst="curvedConnector3">
+          <a:prstGeom prst="bentConnector3">
             <a:avLst>
-              <a:gd name="adj1" fmla="val 50000"/>
+              <a:gd name="adj1" fmla="val 65778"/>
             </a:avLst>
           </a:prstGeom>
           <a:ln w="3175">
@@ -3823,7 +3822,7 @@
         </p:nvSpPr>
         <p:spPr>
           <a:xfrm>
-            <a:off x="6640558" y="3497264"/>
+            <a:off x="6380223" y="3506617"/>
             <a:ext cx="1425244" cy="566928"/>
           </a:xfrm>
           <a:prstGeom prst="rect">
@@ -4053,7 +4052,7 @@
         </p:nvGrpSpPr>
         <p:grpSpPr>
           <a:xfrm>
-            <a:off x="9284958" y="4288569"/>
+            <a:off x="9641526" y="4285222"/>
             <a:ext cx="1783080" cy="1005840"/>
             <a:chOff x="4237345" y="4954856"/>
             <a:chExt cx="1783080" cy="1005840"/>
@@ -4826,18 +4825,20 @@
           </p:cNvPr>
           <p:cNvCxnSpPr>
             <a:cxnSpLocks/>
-            <a:stCxn id="13" idx="1"/>
+            <a:stCxn id="13" idx="2"/>
             <a:endCxn id="20" idx="1"/>
           </p:cNvCxnSpPr>
           <p:nvPr/>
         </p:nvCxnSpPr>
         <p:spPr>
-          <a:xfrm rot="10800000" flipV="1">
-            <a:off x="4560110" y="3768710"/>
-            <a:ext cx="230630" cy="1771624"/>
-          </a:xfrm>
-          <a:prstGeom prst="curvedConnector2">
-            <a:avLst/>
+          <a:xfrm rot="5400000">
+            <a:off x="4287656" y="4324628"/>
+            <a:ext cx="1488160" cy="943252"/>
+          </a:xfrm>
+          <a:prstGeom prst="bentConnector3">
+            <a:avLst>
+              <a:gd name="adj1" fmla="val 22566"/>
+            </a:avLst>
           </a:prstGeom>
           <a:ln w="3175">
             <a:solidFill>
@@ -4883,10 +4884,10 @@
             <a:off x="3290021" y="2521679"/>
             <a:ext cx="253688" cy="2747750"/>
           </a:xfrm>
-          <a:prstGeom prst="curvedConnector4">
+          <a:prstGeom prst="bentConnector4">
             <a:avLst>
               <a:gd name="adj1" fmla="val -90111"/>
-              <a:gd name="adj2" fmla="val 88479"/>
+              <a:gd name="adj2" fmla="val 82818"/>
             </a:avLst>
           </a:prstGeom>
           <a:ln w="3175">
@@ -4923,19 +4924,19 @@
           </p:cNvPr>
           <p:cNvCxnSpPr>
             <a:cxnSpLocks/>
-            <a:stCxn id="3" idx="1"/>
             <a:endCxn id="4" idx="1"/>
           </p:cNvCxnSpPr>
           <p:nvPr/>
         </p:nvCxnSpPr>
         <p:spPr>
-          <a:xfrm rot="10800000" flipV="1">
-            <a:off x="2115011" y="1449065"/>
-            <a:ext cx="12700" cy="1400963"/>
-          </a:xfrm>
-          <a:prstGeom prst="curvedConnector3">
+          <a:xfrm rot="5400000">
+            <a:off x="1499366" y="2234384"/>
+            <a:ext cx="1231290" cy="12700"/>
+          </a:xfrm>
+          <a:prstGeom prst="bentConnector4">
             <a:avLst>
-              <a:gd name="adj1" fmla="val 1800000"/>
+              <a:gd name="adj1" fmla="val -1393"/>
+              <a:gd name="adj2" fmla="val 6166661"/>
             </a:avLst>
           </a:prstGeom>
           <a:ln w="3175">
@@ -4982,9 +4983,9 @@
             <a:off x="2510806" y="1636481"/>
             <a:ext cx="1117499" cy="742671"/>
           </a:xfrm>
-          <a:prstGeom prst="curvedConnector4">
+          <a:prstGeom prst="bentConnector4">
             <a:avLst>
-              <a:gd name="adj1" fmla="val 22728"/>
+              <a:gd name="adj1" fmla="val 7011"/>
               <a:gd name="adj2" fmla="val 130781"/>
             </a:avLst>
           </a:prstGeom>
@@ -5022,19 +5023,19 @@
           </p:cNvPr>
           <p:cNvCxnSpPr>
             <a:cxnSpLocks/>
-            <a:stCxn id="3" idx="1"/>
             <a:endCxn id="22" idx="1"/>
           </p:cNvCxnSpPr>
           <p:nvPr/>
         </p:nvCxnSpPr>
         <p:spPr>
-          <a:xfrm rot="10800000" flipV="1">
-            <a:off x="1289355" y="1449066"/>
-            <a:ext cx="825656" cy="2289868"/>
-          </a:xfrm>
-          <a:prstGeom prst="curvedConnector3">
+          <a:xfrm rot="5400000">
+            <a:off x="466658" y="2084230"/>
+            <a:ext cx="2477401" cy="832006"/>
+          </a:xfrm>
+          <a:prstGeom prst="bentConnector4">
             <a:avLst>
-              <a:gd name="adj1" fmla="val 127687"/>
+              <a:gd name="adj1" fmla="val -149"/>
+              <a:gd name="adj2" fmla="val 161057"/>
             </a:avLst>
           </a:prstGeom>
           <a:ln w="3175">
@@ -5079,9 +5080,9 @@
             <a:off x="3281428" y="1618739"/>
             <a:ext cx="3458601" cy="1096108"/>
           </a:xfrm>
-          <a:prstGeom prst="curvedConnector3">
+          <a:prstGeom prst="bentConnector3">
             <a:avLst>
-              <a:gd name="adj1" fmla="val 50000"/>
+              <a:gd name="adj1" fmla="val 22582"/>
             </a:avLst>
           </a:prstGeom>
           <a:ln w="3175">
@@ -5128,10 +5129,8 @@
             <a:off x="3281429" y="1753803"/>
             <a:ext cx="3458601" cy="1096225"/>
           </a:xfrm>
-          <a:prstGeom prst="curvedConnector3">
-            <a:avLst>
-              <a:gd name="adj1" fmla="val 50000"/>
-            </a:avLst>
+          <a:prstGeom prst="bentConnector3">
+            <a:avLst/>
           </a:prstGeom>
           <a:ln w="3175">
             <a:solidFill>
@@ -5177,7 +5176,7 @@
             <a:off x="7906446" y="1753804"/>
             <a:ext cx="1147650" cy="210705"/>
           </a:xfrm>
-          <a:prstGeom prst="curvedConnector2">
+          <a:prstGeom prst="bentConnector2">
             <a:avLst/>
           </a:prstGeom>
           <a:ln w="3175">
@@ -5220,14 +5219,12 @@
           <p:nvPr/>
         </p:nvCxnSpPr>
         <p:spPr>
-          <a:xfrm rot="5400000">
-            <a:off x="8874243" y="2711290"/>
-            <a:ext cx="359706" cy="12700"/>
-          </a:xfrm>
-          <a:prstGeom prst="curvedConnector3">
-            <a:avLst>
-              <a:gd name="adj1" fmla="val 50000"/>
-            </a:avLst>
+          <a:xfrm>
+            <a:off x="9054096" y="2531437"/>
+            <a:ext cx="0" cy="359706"/>
+          </a:xfrm>
+          <a:prstGeom prst="straightConnector1">
+            <a:avLst/>
           </a:prstGeom>
           <a:ln w="3175">
             <a:solidFill>
@@ -5271,11 +5268,11 @@
         <p:spPr>
           <a:xfrm>
             <a:off x="9766718" y="3174607"/>
-            <a:ext cx="953848" cy="1726610"/>
-          </a:xfrm>
-          <a:prstGeom prst="curvedConnector3">
+            <a:ext cx="1310416" cy="1723263"/>
+          </a:xfrm>
+          <a:prstGeom prst="bentConnector3">
             <a:avLst>
-              <a:gd name="adj1" fmla="val 123966"/>
+              <a:gd name="adj1" fmla="val 117445"/>
             </a:avLst>
           </a:prstGeom>
           <a:ln w="3175">
@@ -5313,16 +5310,15 @@
           <p:cNvCxnSpPr>
             <a:cxnSpLocks/>
             <a:stCxn id="16" idx="1"/>
-            <a:endCxn id="11" idx="2"/>
           </p:cNvCxnSpPr>
           <p:nvPr/>
         </p:nvCxnSpPr>
         <p:spPr>
           <a:xfrm rot="10800000">
-            <a:off x="9054096" y="3458071"/>
-            <a:ext cx="569190" cy="1443146"/>
-          </a:xfrm>
-          <a:prstGeom prst="curvedConnector2">
+            <a:off x="9760568" y="3474622"/>
+            <a:ext cx="219286" cy="1423248"/>
+          </a:xfrm>
+          <a:prstGeom prst="bentConnector2">
             <a:avLst/>
           </a:prstGeom>
           <a:ln w="3175">
@@ -5359,17 +5355,16 @@
           </p:cNvPr>
           <p:cNvCxnSpPr>
             <a:cxnSpLocks/>
-            <a:stCxn id="11" idx="1"/>
             <a:endCxn id="12" idx="0"/>
           </p:cNvCxnSpPr>
           <p:nvPr/>
         </p:nvCxnSpPr>
         <p:spPr>
           <a:xfrm rot="10800000" flipV="1">
-            <a:off x="7353180" y="3174606"/>
-            <a:ext cx="988294" cy="322657"/>
-          </a:xfrm>
-          <a:prstGeom prst="curvedConnector2">
+            <a:off x="7092845" y="3330331"/>
+            <a:ext cx="1248628" cy="176286"/>
+          </a:xfrm>
+          <a:prstGeom prst="bentConnector2">
             <a:avLst/>
           </a:prstGeom>
           <a:ln w="3175">
@@ -5413,10 +5408,10 @@
         </p:nvCxnSpPr>
         <p:spPr>
           <a:xfrm flipV="1">
-            <a:off x="8065802" y="3458071"/>
-            <a:ext cx="988294" cy="322657"/>
-          </a:xfrm>
-          <a:prstGeom prst="curvedConnector2">
+            <a:off x="7805467" y="3458071"/>
+            <a:ext cx="1248629" cy="332010"/>
+          </a:xfrm>
+          <a:prstGeom prst="bentConnector2">
             <a:avLst/>
           </a:prstGeom>
           <a:ln w="3175">
@@ -5453,18 +5448,18 @@
           </p:cNvPr>
           <p:cNvCxnSpPr>
             <a:cxnSpLocks/>
-            <a:stCxn id="11" idx="1"/>
-            <a:endCxn id="13" idx="0"/>
           </p:cNvCxnSpPr>
           <p:nvPr/>
         </p:nvCxnSpPr>
         <p:spPr>
           <a:xfrm rot="10800000" flipV="1">
-            <a:off x="5503362" y="3174606"/>
-            <a:ext cx="2838112" cy="310639"/>
-          </a:xfrm>
-          <a:prstGeom prst="curvedConnector2">
-            <a:avLst/>
+            <a:off x="5721840" y="3027406"/>
+            <a:ext cx="2619635" cy="463845"/>
+          </a:xfrm>
+          <a:prstGeom prst="bentConnector3">
+            <a:avLst>
+              <a:gd name="adj1" fmla="val 100082"/>
+            </a:avLst>
           </a:prstGeom>
           <a:ln w="3175">
             <a:solidFill>
@@ -5500,24 +5495,26 @@
           </p:cNvPr>
           <p:cNvCxnSpPr>
             <a:cxnSpLocks/>
-            <a:stCxn id="9" idx="1"/>
             <a:endCxn id="13" idx="0"/>
           </p:cNvCxnSpPr>
           <p:nvPr/>
         </p:nvCxnSpPr>
         <p:spPr>
-          <a:xfrm rot="10800000" flipV="1">
-            <a:off x="5503363" y="1753804"/>
-            <a:ext cx="1236667" cy="1731442"/>
-          </a:xfrm>
-          <a:prstGeom prst="curvedConnector2">
-            <a:avLst/>
+          <a:xfrm rot="5400000">
+            <a:off x="5357564" y="2110308"/>
+            <a:ext cx="1520737" cy="1229139"/>
+          </a:xfrm>
+          <a:prstGeom prst="bentConnector3">
+            <a:avLst>
+              <a:gd name="adj1" fmla="val -8"/>
+            </a:avLst>
           </a:prstGeom>
           <a:ln w="3175">
             <a:solidFill>
               <a:schemeClr val="tx1"/>
             </a:solidFill>
-            <a:tailEnd type="triangle"/>
+            <a:headEnd type="triangle"/>
+            <a:tailEnd type="none"/>
           </a:ln>
           <a:effectLst/>
         </p:spPr>
@@ -5548,16 +5545,15 @@
           <p:cNvCxnSpPr>
             <a:cxnSpLocks/>
             <a:stCxn id="21" idx="1"/>
-            <a:endCxn id="20" idx="1"/>
           </p:cNvCxnSpPr>
           <p:nvPr/>
         </p:nvCxnSpPr>
         <p:spPr>
           <a:xfrm rot="10800000" flipV="1">
-            <a:off x="4560110" y="4831762"/>
-            <a:ext cx="1047786" cy="708572"/>
-          </a:xfrm>
-          <a:prstGeom prst="curvedConnector2">
+            <a:off x="4938672" y="4831761"/>
+            <a:ext cx="669225" cy="708571"/>
+          </a:xfrm>
+          <a:prstGeom prst="bentConnector2">
             <a:avLst/>
           </a:prstGeom>
           <a:ln w="3175">
@@ -5595,19 +5591,16 @@
           <p:cNvCxnSpPr>
             <a:cxnSpLocks/>
             <a:stCxn id="21" idx="2"/>
-            <a:endCxn id="19" idx="1"/>
           </p:cNvCxnSpPr>
           <p:nvPr/>
         </p:nvCxnSpPr>
         <p:spPr>
-          <a:xfrm rot="16200000" flipH="1">
-            <a:off x="6174563" y="5261181"/>
-            <a:ext cx="425108" cy="133198"/>
-          </a:xfrm>
-          <a:prstGeom prst="curvedConnector3">
-            <a:avLst>
-              <a:gd name="adj1" fmla="val 50000"/>
-            </a:avLst>
+          <a:xfrm>
+            <a:off x="6320518" y="5115226"/>
+            <a:ext cx="0" cy="425107"/>
+          </a:xfrm>
+          <a:prstGeom prst="straightConnector1">
+            <a:avLst/>
           </a:prstGeom>
           <a:ln w="3175">
             <a:solidFill>
@@ -5643,17 +5636,16 @@
           </p:cNvPr>
           <p:cNvCxnSpPr>
             <a:cxnSpLocks/>
-            <a:stCxn id="21" idx="3"/>
             <a:endCxn id="18" idx="1"/>
           </p:cNvCxnSpPr>
           <p:nvPr/>
         </p:nvCxnSpPr>
         <p:spPr>
           <a:xfrm>
-            <a:off x="7033140" y="4831762"/>
-            <a:ext cx="1154162" cy="708572"/>
-          </a:xfrm>
-          <a:prstGeom prst="curvedConnector2">
+            <a:off x="7031657" y="4993347"/>
+            <a:ext cx="1155645" cy="546987"/>
+          </a:xfrm>
+          <a:prstGeom prst="bentConnector2">
             <a:avLst/>
           </a:prstGeom>
           <a:ln w="3175">
@@ -5697,12 +5689,12 @@
         </p:nvCxnSpPr>
         <p:spPr>
           <a:xfrm flipH="1">
-            <a:off x="7033140" y="3780728"/>
-            <a:ext cx="1032662" cy="1051034"/>
-          </a:xfrm>
-          <a:prstGeom prst="curvedConnector3">
+            <a:off x="7033140" y="3790081"/>
+            <a:ext cx="772327" cy="1041681"/>
+          </a:xfrm>
+          <a:prstGeom prst="bentConnector3">
             <a:avLst>
-              <a:gd name="adj1" fmla="val -22137"/>
+              <a:gd name="adj1" fmla="val -29599"/>
             </a:avLst>
           </a:prstGeom>
           <a:ln w="3175">
@@ -5739,18 +5731,19 @@
           </p:cNvPr>
           <p:cNvCxnSpPr>
             <a:cxnSpLocks/>
-            <a:stCxn id="21" idx="3"/>
             <a:endCxn id="12" idx="2"/>
           </p:cNvCxnSpPr>
           <p:nvPr/>
         </p:nvCxnSpPr>
         <p:spPr>
-          <a:xfrm flipV="1">
-            <a:off x="7033140" y="4064192"/>
-            <a:ext cx="320040" cy="767570"/>
-          </a:xfrm>
-          <a:prstGeom prst="curvedConnector2">
-            <a:avLst/>
+          <a:xfrm rot="5400000" flipH="1" flipV="1">
+            <a:off x="6754037" y="4351163"/>
+            <a:ext cx="616426" cy="61190"/>
+          </a:xfrm>
+          <a:prstGeom prst="bentConnector3">
+            <a:avLst>
+              <a:gd name="adj1" fmla="val 227"/>
+            </a:avLst>
           </a:prstGeom>
           <a:ln w="3175">
             <a:solidFill>
@@ -5823,40 +5816,921 @@
           </a:p>
         </p:txBody>
       </p:sp>
+      <p:sp>
+        <p:nvSpPr>
+          <p:cNvPr id="54" name="TextBox 53">
+            <a:extLst>
+              <a:ext uri="{FF2B5EF4-FFF2-40B4-BE49-F238E27FC236}">
+                <a16:creationId xmlns:a16="http://schemas.microsoft.com/office/drawing/2014/main" id="{7ABB0C9E-B902-ABB4-1C5B-20464D25CB30}"/>
+              </a:ext>
+            </a:extLst>
+          </p:cNvPr>
+          <p:cNvSpPr txBox="1"/>
+          <p:nvPr/>
+        </p:nvSpPr>
+        <p:spPr>
+          <a:xfrm>
+            <a:off x="765023" y="1046087"/>
+            <a:ext cx="1343638" cy="215444"/>
+          </a:xfrm>
+          <a:prstGeom prst="rect">
+            <a:avLst/>
+          </a:prstGeom>
+          <a:noFill/>
+        </p:spPr>
+        <p:txBody>
+          <a:bodyPr wrap="none" rtlCol="0">
+            <a:spAutoFit/>
+          </a:bodyPr>
+          <a:lstStyle/>
+          <a:p>
+            <a:pPr algn="ctr"/>
+            <a:r>
+              <a:rPr kumimoji="1" lang="ko-KR" altLang="en-US" sz="800" dirty="0"/>
+              <a:t>답변 평가</a:t>
+            </a:r>
+            <a:r>
+              <a:rPr kumimoji="1" lang="en-US" altLang="ko-KR" sz="800" dirty="0"/>
+              <a:t>,</a:t>
+            </a:r>
+            <a:r>
+              <a:rPr kumimoji="1" lang="ko-KR" altLang="en-US" sz="800" dirty="0"/>
+              <a:t> 큐레이션 요청</a:t>
+            </a:r>
+          </a:p>
+        </p:txBody>
+      </p:sp>
+      <p:sp>
+        <p:nvSpPr>
+          <p:cNvPr id="55" name="TextBox 54">
+            <a:extLst>
+              <a:ext uri="{FF2B5EF4-FFF2-40B4-BE49-F238E27FC236}">
+                <a16:creationId xmlns:a16="http://schemas.microsoft.com/office/drawing/2014/main" id="{0C6DB2FC-12E9-48C4-74FA-14B3BB8BE04A}"/>
+              </a:ext>
+            </a:extLst>
+          </p:cNvPr>
+          <p:cNvSpPr txBox="1"/>
+          <p:nvPr/>
+        </p:nvSpPr>
+        <p:spPr>
+          <a:xfrm>
+            <a:off x="1308940" y="1283830"/>
+            <a:ext cx="837089" cy="338554"/>
+          </a:xfrm>
+          <a:prstGeom prst="rect">
+            <a:avLst/>
+          </a:prstGeom>
+          <a:noFill/>
+        </p:spPr>
+        <p:txBody>
+          <a:bodyPr wrap="none" rtlCol="0">
+            <a:spAutoFit/>
+          </a:bodyPr>
+          <a:lstStyle/>
+          <a:p>
+            <a:pPr algn="ctr"/>
+            <a:r>
+              <a:rPr kumimoji="1" lang="ko-KR" altLang="en-US" sz="800" dirty="0"/>
+              <a:t>자연어 질의</a:t>
+            </a:r>
+            <a:br>
+              <a:rPr kumimoji="1" lang="en-US" altLang="ko-KR" sz="800" dirty="0"/>
+            </a:br>
+            <a:r>
+              <a:rPr kumimoji="1" lang="ko-KR" altLang="en-US" sz="800" dirty="0"/>
+              <a:t>컨텍스트 범위</a:t>
+            </a:r>
+          </a:p>
+        </p:txBody>
+      </p:sp>
+      <p:sp>
+        <p:nvSpPr>
+          <p:cNvPr id="58" name="TextBox 57">
+            <a:extLst>
+              <a:ext uri="{FF2B5EF4-FFF2-40B4-BE49-F238E27FC236}">
+                <a16:creationId xmlns:a16="http://schemas.microsoft.com/office/drawing/2014/main" id="{40351CC7-2AD9-A230-B305-42F2B47AB341}"/>
+              </a:ext>
+            </a:extLst>
+          </p:cNvPr>
+          <p:cNvSpPr txBox="1"/>
+          <p:nvPr/>
+        </p:nvSpPr>
+        <p:spPr>
+          <a:xfrm>
+            <a:off x="2760719" y="2276922"/>
+            <a:ext cx="734495" cy="215444"/>
+          </a:xfrm>
+          <a:prstGeom prst="rect">
+            <a:avLst/>
+          </a:prstGeom>
+          <a:noFill/>
+        </p:spPr>
+        <p:txBody>
+          <a:bodyPr wrap="none" rtlCol="0">
+            <a:spAutoFit/>
+          </a:bodyPr>
+          <a:lstStyle/>
+          <a:p>
+            <a:pPr algn="ctr"/>
+            <a:r>
+              <a:rPr kumimoji="1" lang="ko-KR" altLang="en-US" sz="800" dirty="0"/>
+              <a:t>응답 렌더링</a:t>
+            </a:r>
+          </a:p>
+        </p:txBody>
+      </p:sp>
+      <p:sp>
+        <p:nvSpPr>
+          <p:cNvPr id="60" name="TextBox 59">
+            <a:extLst>
+              <a:ext uri="{FF2B5EF4-FFF2-40B4-BE49-F238E27FC236}">
+                <a16:creationId xmlns:a16="http://schemas.microsoft.com/office/drawing/2014/main" id="{621DD31C-8886-6C12-82AB-FC8039213459}"/>
+              </a:ext>
+            </a:extLst>
+          </p:cNvPr>
+          <p:cNvSpPr txBox="1"/>
+          <p:nvPr/>
+        </p:nvSpPr>
+        <p:spPr>
+          <a:xfrm>
+            <a:off x="2743846" y="3136336"/>
+            <a:ext cx="877163" cy="215444"/>
+          </a:xfrm>
+          <a:prstGeom prst="rect">
+            <a:avLst/>
+          </a:prstGeom>
+          <a:noFill/>
+        </p:spPr>
+        <p:txBody>
+          <a:bodyPr wrap="none" rtlCol="0">
+            <a:spAutoFit/>
+          </a:bodyPr>
+          <a:lstStyle/>
+          <a:p>
+            <a:pPr algn="ctr"/>
+            <a:r>
+              <a:rPr kumimoji="1" lang="ko-KR" altLang="en-US" sz="800" dirty="0"/>
+              <a:t>권한 확인</a:t>
+            </a:r>
+            <a:r>
+              <a:rPr kumimoji="1" lang="en-US" altLang="ko-KR" sz="800" dirty="0"/>
+              <a:t>/</a:t>
+            </a:r>
+            <a:r>
+              <a:rPr kumimoji="1" lang="ko-KR" altLang="en-US" sz="800" dirty="0"/>
+              <a:t>결과</a:t>
+            </a:r>
+          </a:p>
+        </p:txBody>
+      </p:sp>
+      <p:sp>
+        <p:nvSpPr>
+          <p:cNvPr id="62" name="TextBox 61">
+            <a:extLst>
+              <a:ext uri="{FF2B5EF4-FFF2-40B4-BE49-F238E27FC236}">
+                <a16:creationId xmlns:a16="http://schemas.microsoft.com/office/drawing/2014/main" id="{180DFF99-9B52-F0E5-3893-8F2DB526D2B8}"/>
+              </a:ext>
+            </a:extLst>
+          </p:cNvPr>
+          <p:cNvSpPr txBox="1"/>
+          <p:nvPr/>
+        </p:nvSpPr>
+        <p:spPr>
+          <a:xfrm>
+            <a:off x="2422990" y="4026553"/>
+            <a:ext cx="1035861" cy="215444"/>
+          </a:xfrm>
+          <a:prstGeom prst="rect">
+            <a:avLst/>
+          </a:prstGeom>
+          <a:noFill/>
+        </p:spPr>
+        <p:txBody>
+          <a:bodyPr wrap="none" rtlCol="0">
+            <a:spAutoFit/>
+          </a:bodyPr>
+          <a:lstStyle/>
+          <a:p>
+            <a:pPr algn="ctr"/>
+            <a:r>
+              <a:rPr kumimoji="1" lang="ko-KR" altLang="en-US" sz="800" dirty="0"/>
+              <a:t>평가</a:t>
+            </a:r>
+            <a:r>
+              <a:rPr kumimoji="1" lang="en-US" altLang="ko-KR" sz="800" dirty="0"/>
+              <a:t>,</a:t>
+            </a:r>
+            <a:r>
+              <a:rPr kumimoji="1" lang="ko-KR" altLang="en-US" sz="800" dirty="0"/>
+              <a:t> 자산화 요청</a:t>
+            </a:r>
+          </a:p>
+        </p:txBody>
+      </p:sp>
+      <p:sp>
+        <p:nvSpPr>
+          <p:cNvPr id="65" name="TextBox 64">
+            <a:extLst>
+              <a:ext uri="{FF2B5EF4-FFF2-40B4-BE49-F238E27FC236}">
+                <a16:creationId xmlns:a16="http://schemas.microsoft.com/office/drawing/2014/main" id="{6395658E-16C3-0F8C-0BFD-09CF0B9DF203}"/>
+              </a:ext>
+            </a:extLst>
+          </p:cNvPr>
+          <p:cNvSpPr txBox="1"/>
+          <p:nvPr/>
+        </p:nvSpPr>
+        <p:spPr>
+          <a:xfrm>
+            <a:off x="3676299" y="2840990"/>
+            <a:ext cx="631903" cy="215444"/>
+          </a:xfrm>
+          <a:prstGeom prst="rect">
+            <a:avLst/>
+          </a:prstGeom>
+          <a:noFill/>
+        </p:spPr>
+        <p:txBody>
+          <a:bodyPr wrap="none" rtlCol="0">
+            <a:spAutoFit/>
+          </a:bodyPr>
+          <a:lstStyle/>
+          <a:p>
+            <a:pPr algn="ctr"/>
+            <a:r>
+              <a:rPr kumimoji="1" lang="ko-KR" altLang="en-US" sz="800" dirty="0"/>
+              <a:t>응답 전달</a:t>
+            </a:r>
+          </a:p>
+        </p:txBody>
+      </p:sp>
+      <p:sp>
+        <p:nvSpPr>
+          <p:cNvPr id="66" name="TextBox 65">
+            <a:extLst>
+              <a:ext uri="{FF2B5EF4-FFF2-40B4-BE49-F238E27FC236}">
+                <a16:creationId xmlns:a16="http://schemas.microsoft.com/office/drawing/2014/main" id="{5964740F-F6BF-4949-2EDC-E54388ED3266}"/>
+              </a:ext>
+            </a:extLst>
+          </p:cNvPr>
+          <p:cNvSpPr txBox="1"/>
+          <p:nvPr/>
+        </p:nvSpPr>
+        <p:spPr>
+          <a:xfrm>
+            <a:off x="5123320" y="1396494"/>
+            <a:ext cx="1013419" cy="215444"/>
+          </a:xfrm>
+          <a:prstGeom prst="rect">
+            <a:avLst/>
+          </a:prstGeom>
+          <a:noFill/>
+        </p:spPr>
+        <p:txBody>
+          <a:bodyPr wrap="none" rtlCol="0">
+            <a:spAutoFit/>
+          </a:bodyPr>
+          <a:lstStyle/>
+          <a:p>
+            <a:pPr algn="ctr"/>
+            <a:r>
+              <a:rPr kumimoji="1" lang="ko-KR" altLang="en-US" sz="800" dirty="0"/>
+              <a:t>세션 메시지 전달</a:t>
+            </a:r>
+          </a:p>
+        </p:txBody>
+      </p:sp>
+      <p:sp>
+        <p:nvSpPr>
+          <p:cNvPr id="73" name="TextBox 72">
+            <a:extLst>
+              <a:ext uri="{FF2B5EF4-FFF2-40B4-BE49-F238E27FC236}">
+                <a16:creationId xmlns:a16="http://schemas.microsoft.com/office/drawing/2014/main" id="{2A6B04DA-8AA7-E83A-8AAD-AE378B0516B6}"/>
+              </a:ext>
+            </a:extLst>
+          </p:cNvPr>
+          <p:cNvSpPr txBox="1"/>
+          <p:nvPr/>
+        </p:nvSpPr>
+        <p:spPr>
+          <a:xfrm>
+            <a:off x="5505797" y="1965848"/>
+            <a:ext cx="1261884" cy="215444"/>
+          </a:xfrm>
+          <a:prstGeom prst="rect">
+            <a:avLst/>
+          </a:prstGeom>
+          <a:noFill/>
+        </p:spPr>
+        <p:txBody>
+          <a:bodyPr wrap="none" rtlCol="0">
+            <a:spAutoFit/>
+          </a:bodyPr>
+          <a:lstStyle/>
+          <a:p>
+            <a:pPr algn="ctr"/>
+            <a:r>
+              <a:rPr kumimoji="1" lang="ko-KR" altLang="en-US" sz="800" dirty="0"/>
+              <a:t>이력 저장 </a:t>
+            </a:r>
+            <a:r>
+              <a:rPr kumimoji="1" lang="en-US" altLang="ko-KR" sz="800" dirty="0"/>
+              <a:t>+</a:t>
+            </a:r>
+            <a:r>
+              <a:rPr kumimoji="1" lang="ko-KR" altLang="en-US" sz="800" dirty="0"/>
+              <a:t> 응답 회신</a:t>
+            </a:r>
+          </a:p>
+        </p:txBody>
+      </p:sp>
+      <p:sp>
+        <p:nvSpPr>
+          <p:cNvPr id="76" name="TextBox 75">
+            <a:extLst>
+              <a:ext uri="{FF2B5EF4-FFF2-40B4-BE49-F238E27FC236}">
+                <a16:creationId xmlns:a16="http://schemas.microsoft.com/office/drawing/2014/main" id="{D20BCCDF-29A7-800B-939F-31B0F34B1ECA}"/>
+              </a:ext>
+            </a:extLst>
+          </p:cNvPr>
+          <p:cNvSpPr txBox="1"/>
+          <p:nvPr/>
+        </p:nvSpPr>
+        <p:spPr>
+          <a:xfrm>
+            <a:off x="7867728" y="1530125"/>
+            <a:ext cx="1277914" cy="215444"/>
+          </a:xfrm>
+          <a:prstGeom prst="rect">
+            <a:avLst/>
+          </a:prstGeom>
+          <a:noFill/>
+        </p:spPr>
+        <p:txBody>
+          <a:bodyPr wrap="none" rtlCol="0">
+            <a:spAutoFit/>
+          </a:bodyPr>
+          <a:lstStyle/>
+          <a:p>
+            <a:pPr algn="ctr"/>
+            <a:r>
+              <a:rPr kumimoji="1" lang="ko-KR" altLang="en-US" sz="800" dirty="0"/>
+              <a:t>의도 분류</a:t>
+            </a:r>
+            <a:r>
+              <a:rPr kumimoji="1" lang="en-US" altLang="ko-KR" sz="800" dirty="0"/>
+              <a:t>,</a:t>
+            </a:r>
+            <a:r>
+              <a:rPr kumimoji="1" lang="ko-KR" altLang="en-US" sz="800" dirty="0"/>
+              <a:t> 라우팅 요청</a:t>
+            </a:r>
+          </a:p>
+        </p:txBody>
+      </p:sp>
+      <p:sp>
+        <p:nvSpPr>
+          <p:cNvPr id="77" name="TextBox 76">
+            <a:extLst>
+              <a:ext uri="{FF2B5EF4-FFF2-40B4-BE49-F238E27FC236}">
+                <a16:creationId xmlns:a16="http://schemas.microsoft.com/office/drawing/2014/main" id="{45AA9D91-AEBF-28EC-83FF-7DE28B0ECC91}"/>
+              </a:ext>
+            </a:extLst>
+          </p:cNvPr>
+          <p:cNvSpPr txBox="1"/>
+          <p:nvPr/>
+        </p:nvSpPr>
+        <p:spPr>
+          <a:xfrm>
+            <a:off x="8971782" y="2585043"/>
+            <a:ext cx="1039067" cy="215444"/>
+          </a:xfrm>
+          <a:prstGeom prst="rect">
+            <a:avLst/>
+          </a:prstGeom>
+          <a:noFill/>
+        </p:spPr>
+        <p:txBody>
+          <a:bodyPr wrap="none" rtlCol="0">
+            <a:spAutoFit/>
+          </a:bodyPr>
+          <a:lstStyle/>
+          <a:p>
+            <a:pPr algn="ctr"/>
+            <a:r>
+              <a:rPr kumimoji="1" lang="en-US" altLang="ko-KR" sz="800" dirty="0"/>
+              <a:t>Q&amp;A </a:t>
+            </a:r>
+            <a:r>
+              <a:rPr kumimoji="1" lang="ko-KR" altLang="en-US" sz="800" dirty="0"/>
+              <a:t>의도 라우팅</a:t>
+            </a:r>
+          </a:p>
+        </p:txBody>
+      </p:sp>
+      <p:sp>
+        <p:nvSpPr>
+          <p:cNvPr id="83" name="TextBox 82">
+            <a:extLst>
+              <a:ext uri="{FF2B5EF4-FFF2-40B4-BE49-F238E27FC236}">
+                <a16:creationId xmlns:a16="http://schemas.microsoft.com/office/drawing/2014/main" id="{22C0E9E4-1298-17E3-7203-30F1CE2DD7E5}"/>
+              </a:ext>
+            </a:extLst>
+          </p:cNvPr>
+          <p:cNvSpPr txBox="1"/>
+          <p:nvPr/>
+        </p:nvSpPr>
+        <p:spPr>
+          <a:xfrm>
+            <a:off x="6200300" y="2819411"/>
+            <a:ext cx="1152880" cy="215444"/>
+          </a:xfrm>
+          <a:prstGeom prst="rect">
+            <a:avLst/>
+          </a:prstGeom>
+          <a:noFill/>
+        </p:spPr>
+        <p:txBody>
+          <a:bodyPr wrap="none" rtlCol="0">
+            <a:spAutoFit/>
+          </a:bodyPr>
+          <a:lstStyle/>
+          <a:p>
+            <a:pPr algn="ctr"/>
+            <a:r>
+              <a:rPr kumimoji="1" lang="ko-KR" altLang="en-US" sz="800" dirty="0"/>
+              <a:t>근거 포함 답변 전달</a:t>
+            </a:r>
+          </a:p>
+        </p:txBody>
+      </p:sp>
+      <p:sp>
+        <p:nvSpPr>
+          <p:cNvPr id="84" name="TextBox 83">
+            <a:extLst>
+              <a:ext uri="{FF2B5EF4-FFF2-40B4-BE49-F238E27FC236}">
+                <a16:creationId xmlns:a16="http://schemas.microsoft.com/office/drawing/2014/main" id="{95D1D0AA-CBFE-2D6F-8557-7825E1A56ADD}"/>
+              </a:ext>
+            </a:extLst>
+          </p:cNvPr>
+          <p:cNvSpPr txBox="1"/>
+          <p:nvPr/>
+        </p:nvSpPr>
+        <p:spPr>
+          <a:xfrm>
+            <a:off x="7038456" y="3118612"/>
+            <a:ext cx="1358065" cy="215444"/>
+          </a:xfrm>
+          <a:prstGeom prst="rect">
+            <a:avLst/>
+          </a:prstGeom>
+          <a:noFill/>
+        </p:spPr>
+        <p:txBody>
+          <a:bodyPr wrap="none" rtlCol="0">
+            <a:spAutoFit/>
+          </a:bodyPr>
+          <a:lstStyle/>
+          <a:p>
+            <a:pPr algn="ctr"/>
+            <a:r>
+              <a:rPr kumimoji="1" lang="ko-KR" altLang="en-US" sz="800" dirty="0"/>
+              <a:t>근거 컨텍스트 조립 요청</a:t>
+            </a:r>
+          </a:p>
+        </p:txBody>
+      </p:sp>
+      <p:sp>
+        <p:nvSpPr>
+          <p:cNvPr id="86" name="TextBox 85">
+            <a:extLst>
+              <a:ext uri="{FF2B5EF4-FFF2-40B4-BE49-F238E27FC236}">
+                <a16:creationId xmlns:a16="http://schemas.microsoft.com/office/drawing/2014/main" id="{B184853A-AEFD-4448-2E25-40DCEBE9991C}"/>
+              </a:ext>
+            </a:extLst>
+          </p:cNvPr>
+          <p:cNvSpPr txBox="1"/>
+          <p:nvPr/>
+        </p:nvSpPr>
+        <p:spPr>
+          <a:xfrm>
+            <a:off x="9876811" y="2827806"/>
+            <a:ext cx="1225015" cy="338554"/>
+          </a:xfrm>
+          <a:prstGeom prst="rect">
+            <a:avLst/>
+          </a:prstGeom>
+          <a:noFill/>
+        </p:spPr>
+        <p:txBody>
+          <a:bodyPr wrap="none" rtlCol="0">
+            <a:spAutoFit/>
+          </a:bodyPr>
+          <a:lstStyle/>
+          <a:p>
+            <a:pPr algn="ctr"/>
+            <a:r>
+              <a:rPr kumimoji="1" lang="ko-KR" altLang="en-US" sz="800" dirty="0"/>
+              <a:t>프롬프트 </a:t>
+            </a:r>
+            <a:r>
+              <a:rPr kumimoji="1" lang="en-US" altLang="ko-KR" sz="800" dirty="0"/>
+              <a:t>+</a:t>
+            </a:r>
+            <a:r>
+              <a:rPr kumimoji="1" lang="ko-KR" altLang="en-US" sz="800" dirty="0"/>
+              <a:t> 근거 링크 </a:t>
+            </a:r>
+            <a:br>
+              <a:rPr kumimoji="1" lang="en-US" altLang="ko-KR" sz="800" dirty="0"/>
+            </a:br>
+            <a:r>
+              <a:rPr kumimoji="1" lang="en-US" altLang="ko-KR" sz="800" dirty="0"/>
+              <a:t>+</a:t>
+            </a:r>
+            <a:r>
+              <a:rPr kumimoji="1" lang="ko-KR" altLang="en-US" sz="800" dirty="0"/>
+              <a:t> 컨텍스트</a:t>
+            </a:r>
+          </a:p>
+        </p:txBody>
+      </p:sp>
+      <p:sp>
+        <p:nvSpPr>
+          <p:cNvPr id="87" name="TextBox 86">
+            <a:extLst>
+              <a:ext uri="{FF2B5EF4-FFF2-40B4-BE49-F238E27FC236}">
+                <a16:creationId xmlns:a16="http://schemas.microsoft.com/office/drawing/2014/main" id="{DC7BC63C-6287-D795-6B4F-844CBA22D20D}"/>
+              </a:ext>
+            </a:extLst>
+          </p:cNvPr>
+          <p:cNvSpPr txBox="1"/>
+          <p:nvPr/>
+        </p:nvSpPr>
+        <p:spPr>
+          <a:xfrm>
+            <a:off x="9719510" y="3745605"/>
+            <a:ext cx="734495" cy="215444"/>
+          </a:xfrm>
+          <a:prstGeom prst="rect">
+            <a:avLst/>
+          </a:prstGeom>
+          <a:noFill/>
+        </p:spPr>
+        <p:txBody>
+          <a:bodyPr wrap="none" rtlCol="0">
+            <a:spAutoFit/>
+          </a:bodyPr>
+          <a:lstStyle/>
+          <a:p>
+            <a:pPr algn="ctr"/>
+            <a:r>
+              <a:rPr kumimoji="1" lang="ko-KR" altLang="en-US" sz="800" dirty="0"/>
+              <a:t>자연어 답변</a:t>
+            </a:r>
+          </a:p>
+        </p:txBody>
+      </p:sp>
+      <p:sp>
+        <p:nvSpPr>
+          <p:cNvPr id="88" name="TextBox 87">
+            <a:extLst>
+              <a:ext uri="{FF2B5EF4-FFF2-40B4-BE49-F238E27FC236}">
+                <a16:creationId xmlns:a16="http://schemas.microsoft.com/office/drawing/2014/main" id="{BB736B5B-048B-09EC-342C-4EEC779D9B51}"/>
+              </a:ext>
+            </a:extLst>
+          </p:cNvPr>
+          <p:cNvSpPr txBox="1"/>
+          <p:nvPr/>
+        </p:nvSpPr>
+        <p:spPr>
+          <a:xfrm>
+            <a:off x="8008115" y="4357009"/>
+            <a:ext cx="1188146" cy="338554"/>
+          </a:xfrm>
+          <a:prstGeom prst="rect">
+            <a:avLst/>
+          </a:prstGeom>
+          <a:noFill/>
+        </p:spPr>
+        <p:txBody>
+          <a:bodyPr wrap="none" rtlCol="0">
+            <a:spAutoFit/>
+          </a:bodyPr>
+          <a:lstStyle/>
+          <a:p>
+            <a:pPr algn="ctr"/>
+            <a:r>
+              <a:rPr kumimoji="1" lang="ko-KR" altLang="en-US" sz="800" dirty="0"/>
+              <a:t>하이브리드 질의</a:t>
+            </a:r>
+            <a:br>
+              <a:rPr kumimoji="1" lang="en-US" altLang="ko-KR" sz="800" dirty="0"/>
+            </a:br>
+            <a:r>
+              <a:rPr kumimoji="1" lang="en-US" altLang="ko-KR" sz="800" dirty="0"/>
+              <a:t>(</a:t>
+            </a:r>
+            <a:r>
+              <a:rPr kumimoji="1" lang="ko-KR" altLang="en-US" sz="800" dirty="0" err="1"/>
+              <a:t>백터</a:t>
+            </a:r>
+            <a:r>
+              <a:rPr kumimoji="1" lang="en-US" altLang="ko-KR" sz="800" dirty="0"/>
+              <a:t>,</a:t>
+            </a:r>
+            <a:r>
+              <a:rPr kumimoji="1" lang="ko-KR" altLang="en-US" sz="800" dirty="0"/>
+              <a:t> 검색</a:t>
+            </a:r>
+            <a:r>
+              <a:rPr kumimoji="1" lang="en-US" altLang="ko-KR" sz="800" dirty="0"/>
+              <a:t>,</a:t>
+            </a:r>
+            <a:r>
+              <a:rPr kumimoji="1" lang="ko-KR" altLang="en-US" sz="800" dirty="0"/>
+              <a:t> 카탈로그</a:t>
+            </a:r>
+            <a:r>
+              <a:rPr kumimoji="1" lang="en-US" altLang="ko-KR" sz="800" dirty="0"/>
+              <a:t>)</a:t>
+            </a:r>
+            <a:endParaRPr kumimoji="1" lang="ko-KR" altLang="en-US" sz="800" dirty="0"/>
+          </a:p>
+        </p:txBody>
+      </p:sp>
+      <p:sp>
+        <p:nvSpPr>
+          <p:cNvPr id="89" name="TextBox 88">
+            <a:extLst>
+              <a:ext uri="{FF2B5EF4-FFF2-40B4-BE49-F238E27FC236}">
+                <a16:creationId xmlns:a16="http://schemas.microsoft.com/office/drawing/2014/main" id="{FD6DDBB9-5318-797F-48C3-65A826B1A2BF}"/>
+              </a:ext>
+            </a:extLst>
+          </p:cNvPr>
+          <p:cNvSpPr txBox="1"/>
+          <p:nvPr/>
+        </p:nvSpPr>
+        <p:spPr>
+          <a:xfrm>
+            <a:off x="7784055" y="3466893"/>
+            <a:ext cx="1181734" cy="338554"/>
+          </a:xfrm>
+          <a:prstGeom prst="rect">
+            <a:avLst/>
+          </a:prstGeom>
+          <a:noFill/>
+        </p:spPr>
+        <p:txBody>
+          <a:bodyPr wrap="none" rtlCol="0">
+            <a:spAutoFit/>
+          </a:bodyPr>
+          <a:lstStyle/>
+          <a:p>
+            <a:pPr algn="ctr"/>
+            <a:r>
+              <a:rPr kumimoji="1" lang="ko-KR" altLang="en-US" sz="800" dirty="0"/>
+              <a:t>근거 후보 </a:t>
+            </a:r>
+            <a:r>
+              <a:rPr kumimoji="1" lang="en-US" altLang="ko-KR" sz="800" dirty="0"/>
+              <a:t>+</a:t>
+            </a:r>
+            <a:r>
+              <a:rPr kumimoji="1" lang="ko-KR" altLang="en-US" sz="800" dirty="0"/>
+              <a:t> </a:t>
+            </a:r>
+            <a:br>
+              <a:rPr kumimoji="1" lang="en-US" altLang="ko-KR" sz="800" dirty="0"/>
+            </a:br>
+            <a:r>
+              <a:rPr kumimoji="1" lang="ko-KR" altLang="en-US" sz="800" dirty="0"/>
+              <a:t>컨텍스트 패키지 반환</a:t>
+            </a:r>
+          </a:p>
+        </p:txBody>
+      </p:sp>
+      <p:sp>
+        <p:nvSpPr>
+          <p:cNvPr id="102" name="TextBox 101">
+            <a:extLst>
+              <a:ext uri="{FF2B5EF4-FFF2-40B4-BE49-F238E27FC236}">
+                <a16:creationId xmlns:a16="http://schemas.microsoft.com/office/drawing/2014/main" id="{16C898CD-D61D-539C-84C1-3C7E1E42617A}"/>
+              </a:ext>
+            </a:extLst>
+          </p:cNvPr>
+          <p:cNvSpPr txBox="1"/>
+          <p:nvPr/>
+        </p:nvSpPr>
+        <p:spPr>
+          <a:xfrm>
+            <a:off x="3646656" y="4707235"/>
+            <a:ext cx="1019830" cy="338554"/>
+          </a:xfrm>
+          <a:prstGeom prst="rect">
+            <a:avLst/>
+          </a:prstGeom>
+          <a:noFill/>
+        </p:spPr>
+        <p:txBody>
+          <a:bodyPr wrap="none" rtlCol="0">
+            <a:spAutoFit/>
+          </a:bodyPr>
+          <a:lstStyle/>
+          <a:p>
+            <a:pPr algn="ctr"/>
+            <a:r>
+              <a:rPr kumimoji="1" lang="ko-KR" altLang="en-US" sz="800" dirty="0"/>
+              <a:t>답변 자산 적재 </a:t>
+            </a:r>
+            <a:r>
+              <a:rPr kumimoji="1" lang="en-US" altLang="ko-KR" sz="800" dirty="0"/>
+              <a:t>+</a:t>
+            </a:r>
+            <a:r>
+              <a:rPr kumimoji="1" lang="ko-KR" altLang="en-US" sz="800" dirty="0"/>
+              <a:t> </a:t>
+            </a:r>
+            <a:br>
+              <a:rPr kumimoji="1" lang="en-US" altLang="ko-KR" sz="800" dirty="0"/>
+            </a:br>
+            <a:r>
+              <a:rPr kumimoji="1" lang="ko-KR" altLang="en-US" sz="800" dirty="0"/>
+              <a:t>평가 저장</a:t>
+            </a:r>
+          </a:p>
+        </p:txBody>
+      </p:sp>
+      <p:sp>
+        <p:nvSpPr>
+          <p:cNvPr id="103" name="TextBox 102">
+            <a:extLst>
+              <a:ext uri="{FF2B5EF4-FFF2-40B4-BE49-F238E27FC236}">
+                <a16:creationId xmlns:a16="http://schemas.microsoft.com/office/drawing/2014/main" id="{9466F4C2-3502-909F-BF40-4049BEC5BB5F}"/>
+              </a:ext>
+            </a:extLst>
+          </p:cNvPr>
+          <p:cNvSpPr txBox="1"/>
+          <p:nvPr/>
+        </p:nvSpPr>
+        <p:spPr>
+          <a:xfrm>
+            <a:off x="4938670" y="4520692"/>
+            <a:ext cx="668773" cy="338554"/>
+          </a:xfrm>
+          <a:prstGeom prst="rect">
+            <a:avLst/>
+          </a:prstGeom>
+          <a:noFill/>
+        </p:spPr>
+        <p:txBody>
+          <a:bodyPr wrap="none" rtlCol="0">
+            <a:spAutoFit/>
+          </a:bodyPr>
+          <a:lstStyle/>
+          <a:p>
+            <a:pPr algn="ctr"/>
+            <a:r>
+              <a:rPr kumimoji="1" lang="ko-KR" altLang="en-US" sz="800" dirty="0"/>
+              <a:t>기존 답변 </a:t>
+            </a:r>
+            <a:br>
+              <a:rPr kumimoji="1" lang="en-US" altLang="ko-KR" sz="800" dirty="0"/>
+            </a:br>
+            <a:r>
+              <a:rPr kumimoji="1" lang="ko-KR" altLang="en-US" sz="800" dirty="0"/>
+              <a:t>자산 조회</a:t>
+            </a:r>
+          </a:p>
+        </p:txBody>
+      </p:sp>
+      <p:sp>
+        <p:nvSpPr>
+          <p:cNvPr id="107" name="TextBox 106">
+            <a:extLst>
+              <a:ext uri="{FF2B5EF4-FFF2-40B4-BE49-F238E27FC236}">
+                <a16:creationId xmlns:a16="http://schemas.microsoft.com/office/drawing/2014/main" id="{FBFFC00C-DDCC-2AD3-BB2E-682FB44D8CA5}"/>
+              </a:ext>
+            </a:extLst>
+          </p:cNvPr>
+          <p:cNvSpPr txBox="1"/>
+          <p:nvPr/>
+        </p:nvSpPr>
+        <p:spPr>
+          <a:xfrm>
+            <a:off x="7038456" y="4340285"/>
+            <a:ext cx="873957" cy="215444"/>
+          </a:xfrm>
+          <a:prstGeom prst="rect">
+            <a:avLst/>
+          </a:prstGeom>
+          <a:noFill/>
+        </p:spPr>
+        <p:txBody>
+          <a:bodyPr wrap="none" rtlCol="0">
+            <a:spAutoFit/>
+          </a:bodyPr>
+          <a:lstStyle/>
+          <a:p>
+            <a:pPr algn="ctr"/>
+            <a:r>
+              <a:rPr kumimoji="1" lang="ko-KR" altLang="en-US" sz="800" dirty="0"/>
+              <a:t>결합 결과 반환</a:t>
+            </a:r>
+          </a:p>
+        </p:txBody>
+      </p:sp>
+      <p:sp>
+        <p:nvSpPr>
+          <p:cNvPr id="112" name="TextBox 111">
+            <a:extLst>
+              <a:ext uri="{FF2B5EF4-FFF2-40B4-BE49-F238E27FC236}">
+                <a16:creationId xmlns:a16="http://schemas.microsoft.com/office/drawing/2014/main" id="{56F09C59-EE98-7A43-D25E-61391B9C3AB9}"/>
+              </a:ext>
+            </a:extLst>
+          </p:cNvPr>
+          <p:cNvSpPr txBox="1"/>
+          <p:nvPr/>
+        </p:nvSpPr>
+        <p:spPr>
+          <a:xfrm>
+            <a:off x="6291829" y="5197566"/>
+            <a:ext cx="896399" cy="215444"/>
+          </a:xfrm>
+          <a:prstGeom prst="rect">
+            <a:avLst/>
+          </a:prstGeom>
+          <a:noFill/>
+        </p:spPr>
+        <p:txBody>
+          <a:bodyPr wrap="none" rtlCol="0">
+            <a:spAutoFit/>
+          </a:bodyPr>
+          <a:lstStyle/>
+          <a:p>
+            <a:pPr algn="ctr"/>
+            <a:r>
+              <a:rPr kumimoji="1" lang="ko-KR" altLang="en-US" sz="800" dirty="0"/>
+              <a:t>규칙</a:t>
+            </a:r>
+            <a:r>
+              <a:rPr kumimoji="1" lang="en-US" altLang="ko-KR" sz="800" dirty="0"/>
+              <a:t>,</a:t>
+            </a:r>
+            <a:r>
+              <a:rPr kumimoji="1" lang="ko-KR" altLang="en-US" sz="800" dirty="0"/>
+              <a:t> 링크 조회</a:t>
+            </a:r>
+          </a:p>
+        </p:txBody>
+      </p:sp>
+      <p:sp>
+        <p:nvSpPr>
+          <p:cNvPr id="113" name="TextBox 112">
+            <a:extLst>
+              <a:ext uri="{FF2B5EF4-FFF2-40B4-BE49-F238E27FC236}">
+                <a16:creationId xmlns:a16="http://schemas.microsoft.com/office/drawing/2014/main" id="{B71074C3-A561-6AD4-8E93-042386E0374E}"/>
+              </a:ext>
+            </a:extLst>
+          </p:cNvPr>
+          <p:cNvSpPr txBox="1"/>
+          <p:nvPr/>
+        </p:nvSpPr>
+        <p:spPr>
+          <a:xfrm>
+            <a:off x="8149584" y="5159118"/>
+            <a:ext cx="896399" cy="215444"/>
+          </a:xfrm>
+          <a:prstGeom prst="rect">
+            <a:avLst/>
+          </a:prstGeom>
+          <a:noFill/>
+        </p:spPr>
+        <p:txBody>
+          <a:bodyPr wrap="none" rtlCol="0">
+            <a:spAutoFit/>
+          </a:bodyPr>
+          <a:lstStyle/>
+          <a:p>
+            <a:pPr algn="ctr"/>
+            <a:r>
+              <a:rPr kumimoji="1" lang="ko-KR" altLang="en-US" sz="800" dirty="0"/>
+              <a:t>구조</a:t>
+            </a:r>
+            <a:r>
+              <a:rPr kumimoji="1" lang="en-US" altLang="ko-KR" sz="800" dirty="0"/>
+              <a:t>,</a:t>
+            </a:r>
+            <a:r>
+              <a:rPr kumimoji="1" lang="ko-KR" altLang="en-US" sz="800" dirty="0"/>
+              <a:t> 의존 조회</a:t>
+            </a:r>
+          </a:p>
+        </p:txBody>
+      </p:sp>
     </p:spTree>
     <p:extLst>
       <p:ext uri="{BB962C8B-B14F-4D97-AF65-F5344CB8AC3E}">
         <p14:creationId xmlns:p14="http://schemas.microsoft.com/office/powerpoint/2010/main" val="1614876520"/>
-      </p:ext>
-    </p:extLst>
-  </p:cSld>
-  <p:clrMapOvr>
-    <a:masterClrMapping/>
-  </p:clrMapOvr>
-</p:sld>
-</file>
-
-<file path=ppt/slides/slide3.xml><?xml version="1.0" encoding="utf-8"?>
-<p:sld xmlns:a="http://schemas.openxmlformats.org/drawingml/2006/main" xmlns:r="http://schemas.openxmlformats.org/officeDocument/2006/relationships" xmlns:p="http://schemas.openxmlformats.org/presentationml/2006/main">
-  <p:cSld>
-    <p:spTree>
-      <p:nvGrpSpPr>
-        <p:cNvPr id="1" name=""/>
-        <p:cNvGrpSpPr/>
-        <p:nvPr/>
-      </p:nvGrpSpPr>
-      <p:grpSpPr>
-        <a:xfrm>
-          <a:off x="0" y="0"/>
-          <a:ext cx="0" cy="0"/>
-          <a:chOff x="0" y="0"/>
-          <a:chExt cx="0" cy="0"/>
-        </a:xfrm>
-      </p:grpSpPr>
-    </p:spTree>
-    <p:extLst>
-      <p:ext uri="{BB962C8B-B14F-4D97-AF65-F5344CB8AC3E}">
-        <p14:creationId xmlns:p14="http://schemas.microsoft.com/office/powerpoint/2010/main" val="1163625706"/>
       </p:ext>
     </p:extLst>
   </p:cSld>
